--- a/chapter8/parts/part-07-dvc-pipelines-and-automation/clip.pptx
+++ b/chapter8/parts/part-07-dvc-pipelines-and-automation/clip.pptx
@@ -4506,10 +4506,12 @@
           </a:bodyPr>
           <a:lstStyle/>
           <a:p>
-            <a:pPr>
+            <a:pPr lvl="0" marL="457200" indent="-228600">
+              <a:buFont typeface="Calibri"/>
               <a:spcAft>
                 <a:spcPts val="1000"/>
               </a:spcAft>
+              <a:buSzPct val="100000"/>
               <a:buChar char="•"/>
               <a:lnSpc>
                 <a:spcPts val="2200"/>
@@ -4526,10 +4528,12 @@
             </a:r>
           </a:p>
           <a:p>
-            <a:pPr>
+            <a:pPr lvl="0" marL="457200" indent="-228600">
+              <a:buFont typeface="Calibri"/>
               <a:spcAft>
                 <a:spcPts val="1000"/>
               </a:spcAft>
+              <a:buSzPct val="100000"/>
               <a:buChar char="•"/>
               <a:lnSpc>
                 <a:spcPts val="2200"/>
@@ -4546,10 +4550,12 @@
             </a:r>
           </a:p>
           <a:p>
-            <a:pPr>
+            <a:pPr lvl="0" marL="457200" indent="-228600">
+              <a:buFont typeface="Calibri"/>
               <a:spcAft>
                 <a:spcPts val="1000"/>
               </a:spcAft>
+              <a:buSzPct val="100000"/>
               <a:buChar char="•"/>
               <a:lnSpc>
                 <a:spcPts val="2200"/>
@@ -4685,10 +4691,12 @@
           </a:bodyPr>
           <a:lstStyle/>
           <a:p>
-            <a:pPr>
+            <a:pPr lvl="0" marL="457200" indent="-228600">
+              <a:buFont typeface="Calibri"/>
               <a:spcAft>
                 <a:spcPts val="1000"/>
               </a:spcAft>
+              <a:buSzPct val="100000"/>
               <a:buChar char="•"/>
               <a:lnSpc>
                 <a:spcPts val="2200"/>
@@ -4705,10 +4713,12 @@
             </a:r>
           </a:p>
           <a:p>
-            <a:pPr>
+            <a:pPr lvl="0" marL="457200" indent="-228600">
+              <a:buFont typeface="Calibri"/>
               <a:spcAft>
                 <a:spcPts val="1000"/>
               </a:spcAft>
+              <a:buSzPct val="100000"/>
               <a:buChar char="•"/>
               <a:lnSpc>
                 <a:spcPts val="2200"/>
@@ -4844,10 +4854,12 @@
           </a:bodyPr>
           <a:lstStyle/>
           <a:p>
-            <a:pPr>
+            <a:pPr lvl="0" marL="457200" indent="-228600">
+              <a:buFont typeface="Calibri"/>
               <a:spcAft>
                 <a:spcPts val="1000"/>
               </a:spcAft>
+              <a:buSzPct val="100000"/>
               <a:buChar char="•"/>
               <a:lnSpc>
                 <a:spcPts val="2200"/>
@@ -4983,10 +4995,12 @@
           </a:bodyPr>
           <a:lstStyle/>
           <a:p>
-            <a:pPr>
+            <a:pPr lvl="0" marL="457200" indent="-228600">
+              <a:buFont typeface="Calibri"/>
               <a:spcAft>
                 <a:spcPts val="1000"/>
               </a:spcAft>
+              <a:buSzPct val="100000"/>
               <a:buChar char="•"/>
               <a:lnSpc>
                 <a:spcPts val="2200"/>
@@ -5003,10 +5017,12 @@
             </a:r>
           </a:p>
           <a:p>
-            <a:pPr>
+            <a:pPr lvl="0" marL="457200" indent="-228600">
+              <a:buFont typeface="Calibri"/>
               <a:spcAft>
                 <a:spcPts val="1000"/>
               </a:spcAft>
+              <a:buSzPct val="100000"/>
               <a:buChar char="•"/>
               <a:lnSpc>
                 <a:spcPts val="2200"/>
@@ -5142,10 +5158,12 @@
           </a:bodyPr>
           <a:lstStyle/>
           <a:p>
-            <a:pPr>
+            <a:pPr lvl="0" marL="457200" indent="-228600">
+              <a:buFont typeface="Calibri"/>
               <a:spcAft>
                 <a:spcPts val="1000"/>
               </a:spcAft>
+              <a:buSzPct val="100000"/>
               <a:buChar char="•"/>
               <a:lnSpc>
                 <a:spcPts val="2200"/>
@@ -5162,10 +5180,12 @@
             </a:r>
           </a:p>
           <a:p>
-            <a:pPr>
+            <a:pPr lvl="0" marL="457200" indent="-228600">
+              <a:buFont typeface="Calibri"/>
               <a:spcAft>
                 <a:spcPts val="1000"/>
               </a:spcAft>
+              <a:buSzPct val="100000"/>
               <a:buChar char="•"/>
               <a:lnSpc>
                 <a:spcPts val="2200"/>
@@ -5182,10 +5202,12 @@
             </a:r>
           </a:p>
           <a:p>
-            <a:pPr>
+            <a:pPr lvl="0" marL="457200" indent="-228600">
+              <a:buFont typeface="Calibri"/>
               <a:spcAft>
                 <a:spcPts val="1000"/>
               </a:spcAft>
+              <a:buSzPct val="100000"/>
               <a:buChar char="•"/>
               <a:lnSpc>
                 <a:spcPts val="2200"/>
@@ -5202,10 +5224,12 @@
             </a:r>
           </a:p>
           <a:p>
-            <a:pPr>
+            <a:pPr lvl="0" marL="457200" indent="-228600">
+              <a:buFont typeface="Calibri"/>
               <a:spcAft>
                 <a:spcPts val="1000"/>
               </a:spcAft>
+              <a:buSzPct val="100000"/>
               <a:buChar char="•"/>
               <a:lnSpc>
                 <a:spcPts val="2200"/>
@@ -5341,10 +5365,12 @@
           </a:bodyPr>
           <a:lstStyle/>
           <a:p>
-            <a:pPr>
+            <a:pPr lvl="0" marL="457200" indent="-228600">
+              <a:buFont typeface="Calibri"/>
               <a:spcAft>
                 <a:spcPts val="1000"/>
               </a:spcAft>
+              <a:buSzPct val="100000"/>
               <a:buChar char="•"/>
               <a:lnSpc>
                 <a:spcPts val="2200"/>
@@ -5361,10 +5387,12 @@
             </a:r>
           </a:p>
           <a:p>
-            <a:pPr>
+            <a:pPr lvl="0" marL="457200" indent="-228600">
+              <a:buFont typeface="Calibri"/>
               <a:spcAft>
                 <a:spcPts val="1000"/>
               </a:spcAft>
+              <a:buSzPct val="100000"/>
               <a:buChar char="•"/>
               <a:lnSpc>
                 <a:spcPts val="2200"/>
@@ -5381,10 +5409,12 @@
             </a:r>
           </a:p>
           <a:p>
-            <a:pPr>
+            <a:pPr lvl="0" marL="457200" indent="-228600">
+              <a:buFont typeface="Calibri"/>
               <a:spcAft>
                 <a:spcPts val="1000"/>
               </a:spcAft>
+              <a:buSzPct val="100000"/>
               <a:buChar char="•"/>
               <a:lnSpc>
                 <a:spcPts val="2200"/>
@@ -5520,10 +5550,12 @@
           </a:bodyPr>
           <a:lstStyle/>
           <a:p>
-            <a:pPr>
+            <a:pPr lvl="0" marL="457200" indent="-228600">
+              <a:buFont typeface="Calibri"/>
               <a:spcAft>
                 <a:spcPts val="1000"/>
               </a:spcAft>
+              <a:buSzPct val="100000"/>
               <a:buChar char="•"/>
               <a:lnSpc>
                 <a:spcPts val="2200"/>
@@ -5540,10 +5572,12 @@
             </a:r>
           </a:p>
           <a:p>
-            <a:pPr>
+            <a:pPr lvl="0" marL="457200" indent="-228600">
+              <a:buFont typeface="Calibri"/>
               <a:spcAft>
                 <a:spcPts val="1000"/>
               </a:spcAft>
+              <a:buSzPct val="100000"/>
               <a:buChar char="•"/>
               <a:lnSpc>
                 <a:spcPts val="2200"/>
@@ -5560,10 +5594,12 @@
             </a:r>
           </a:p>
           <a:p>
-            <a:pPr>
+            <a:pPr lvl="0" marL="457200" indent="-228600">
+              <a:buFont typeface="Calibri"/>
               <a:spcAft>
                 <a:spcPts val="1000"/>
               </a:spcAft>
+              <a:buSzPct val="100000"/>
               <a:buChar char="•"/>
               <a:lnSpc>
                 <a:spcPts val="2200"/>
@@ -5580,10 +5616,12 @@
             </a:r>
           </a:p>
           <a:p>
-            <a:pPr>
+            <a:pPr lvl="0" marL="457200" indent="-228600">
+              <a:buFont typeface="Calibri"/>
               <a:spcAft>
                 <a:spcPts val="1000"/>
               </a:spcAft>
+              <a:buSzPct val="100000"/>
               <a:buChar char="•"/>
               <a:lnSpc>
                 <a:spcPts val="2200"/>
@@ -6182,10 +6220,12 @@
           </a:bodyPr>
           <a:lstStyle/>
           <a:p>
-            <a:pPr>
+            <a:pPr lvl="0" marL="457200" indent="-228600">
+              <a:buFont typeface="Calibri"/>
               <a:spcAft>
                 <a:spcPts val="1000"/>
               </a:spcAft>
+              <a:buSzPct val="100000"/>
               <a:buChar char="•"/>
               <a:lnSpc>
                 <a:spcPts val="2200"/>
@@ -6202,10 +6242,12 @@
             </a:r>
           </a:p>
           <a:p>
-            <a:pPr>
+            <a:pPr lvl="0" marL="457200" indent="-228600">
+              <a:buFont typeface="Calibri"/>
               <a:spcAft>
                 <a:spcPts val="1000"/>
               </a:spcAft>
+              <a:buSzPct val="100000"/>
               <a:buChar char="•"/>
               <a:lnSpc>
                 <a:spcPts val="2200"/>
@@ -6341,10 +6383,12 @@
           </a:bodyPr>
           <a:lstStyle/>
           <a:p>
-            <a:pPr>
+            <a:pPr lvl="0" marL="457200" indent="-228600">
+              <a:buFont typeface="Calibri"/>
               <a:spcAft>
                 <a:spcPts val="1000"/>
               </a:spcAft>
+              <a:buSzPct val="100000"/>
               <a:buChar char="•"/>
               <a:lnSpc>
                 <a:spcPts val="2200"/>
@@ -6361,10 +6405,12 @@
             </a:r>
           </a:p>
           <a:p>
-            <a:pPr>
+            <a:pPr lvl="0" marL="457200" indent="-228600">
+              <a:buFont typeface="Calibri"/>
               <a:spcAft>
                 <a:spcPts val="1000"/>
               </a:spcAft>
+              <a:buSzPct val="100000"/>
               <a:buChar char="•"/>
               <a:lnSpc>
                 <a:spcPts val="2200"/>
@@ -6381,10 +6427,12 @@
             </a:r>
           </a:p>
           <a:p>
-            <a:pPr>
+            <a:pPr lvl="0" marL="457200" indent="-228600">
+              <a:buFont typeface="Calibri"/>
               <a:spcAft>
                 <a:spcPts val="1000"/>
               </a:spcAft>
+              <a:buSzPct val="100000"/>
               <a:buChar char="•"/>
               <a:lnSpc>
                 <a:spcPts val="2200"/>
@@ -6401,10 +6449,12 @@
             </a:r>
           </a:p>
           <a:p>
-            <a:pPr>
+            <a:pPr lvl="0" marL="457200" indent="-228600">
+              <a:buFont typeface="Calibri"/>
               <a:spcAft>
                 <a:spcPts val="1000"/>
               </a:spcAft>
+              <a:buSzPct val="100000"/>
               <a:buChar char="•"/>
               <a:lnSpc>
                 <a:spcPts val="2200"/>
